--- a/slides/05-querying.pptx
+++ b/slides/05-querying.pptx
@@ -207,7 +207,7 @@
           <a:p>
             <a:fld id="{15DA2908-672F-DC48-8CAD-AEE711B947DA}" type="datetimeFigureOut">
               <a:rPr lang="en-US" smtClean="0"/>
-              <a:t>6/26/25</a:t>
+              <a:t>7/27/26</a:t>
             </a:fld>
             <a:endParaRPr lang="en-US"/>
           </a:p>
@@ -2212,6 +2212,13 @@
               </a:ext>
             </a:extLst>
           </p:spPr>
+          <p:txBody>
+            <a:bodyPr/>
+            <a:lstStyle/>
+            <a:p>
+              <a:endParaRPr lang="en-US"/>
+            </a:p>
+          </p:txBody>
         </p:sp>
         <p:sp>
           <p:nvSpPr>
@@ -2280,6 +2287,13 @@
               </a:ext>
             </a:extLst>
           </p:spPr>
+          <p:txBody>
+            <a:bodyPr/>
+            <a:lstStyle/>
+            <a:p>
+              <a:endParaRPr lang="en-US"/>
+            </a:p>
+          </p:txBody>
         </p:sp>
         <p:sp>
           <p:nvSpPr>
@@ -2353,6 +2367,13 @@
               </a:ext>
             </a:extLst>
           </p:spPr>
+          <p:txBody>
+            <a:bodyPr/>
+            <a:lstStyle/>
+            <a:p>
+              <a:endParaRPr lang="en-US"/>
+            </a:p>
+          </p:txBody>
         </p:sp>
         <p:sp>
           <p:nvSpPr>
@@ -2416,6 +2437,13 @@
               </a:ext>
             </a:extLst>
           </p:spPr>
+          <p:txBody>
+            <a:bodyPr/>
+            <a:lstStyle/>
+            <a:p>
+              <a:endParaRPr lang="en-US"/>
+            </a:p>
+          </p:txBody>
         </p:sp>
         <p:sp>
           <p:nvSpPr>
@@ -2469,6 +2497,13 @@
               </a:ext>
             </a:extLst>
           </p:spPr>
+          <p:txBody>
+            <a:bodyPr/>
+            <a:lstStyle/>
+            <a:p>
+              <a:endParaRPr lang="en-US"/>
+            </a:p>
+          </p:txBody>
         </p:sp>
         <p:sp>
           <p:nvSpPr>
@@ -2532,6 +2567,13 @@
               </a:ext>
             </a:extLst>
           </p:spPr>
+          <p:txBody>
+            <a:bodyPr/>
+            <a:lstStyle/>
+            <a:p>
+              <a:endParaRPr lang="en-US"/>
+            </a:p>
+          </p:txBody>
         </p:sp>
         <p:sp>
           <p:nvSpPr>
@@ -2590,6 +2632,13 @@
               </a:ext>
             </a:extLst>
           </p:spPr>
+          <p:txBody>
+            <a:bodyPr/>
+            <a:lstStyle/>
+            <a:p>
+              <a:endParaRPr lang="en-US"/>
+            </a:p>
+          </p:txBody>
         </p:sp>
         <p:sp>
           <p:nvSpPr>
@@ -2643,6 +2692,13 @@
               </a:ext>
             </a:extLst>
           </p:spPr>
+          <p:txBody>
+            <a:bodyPr/>
+            <a:lstStyle/>
+            <a:p>
+              <a:endParaRPr lang="en-US"/>
+            </a:p>
+          </p:txBody>
         </p:sp>
         <p:sp>
           <p:nvSpPr>
@@ -2701,6 +2757,13 @@
               </a:ext>
             </a:extLst>
           </p:spPr>
+          <p:txBody>
+            <a:bodyPr/>
+            <a:lstStyle/>
+            <a:p>
+              <a:endParaRPr lang="en-US"/>
+            </a:p>
+          </p:txBody>
         </p:sp>
         <p:sp>
           <p:nvSpPr>
@@ -2754,6 +2817,13 @@
               </a:ext>
             </a:extLst>
           </p:spPr>
+          <p:txBody>
+            <a:bodyPr/>
+            <a:lstStyle/>
+            <a:p>
+              <a:endParaRPr lang="en-US"/>
+            </a:p>
+          </p:txBody>
         </p:sp>
         <p:sp>
           <p:nvSpPr>
@@ -2812,6 +2882,13 @@
               </a:ext>
             </a:extLst>
           </p:spPr>
+          <p:txBody>
+            <a:bodyPr/>
+            <a:lstStyle/>
+            <a:p>
+              <a:endParaRPr lang="en-US"/>
+            </a:p>
+          </p:txBody>
         </p:sp>
         <p:sp>
           <p:nvSpPr>
@@ -2865,6 +2942,13 @@
               </a:ext>
             </a:extLst>
           </p:spPr>
+          <p:txBody>
+            <a:bodyPr/>
+            <a:lstStyle/>
+            <a:p>
+              <a:endParaRPr lang="en-US"/>
+            </a:p>
+          </p:txBody>
         </p:sp>
         <p:sp>
           <p:nvSpPr>
@@ -2923,6 +3007,13 @@
               </a:ext>
             </a:extLst>
           </p:spPr>
+          <p:txBody>
+            <a:bodyPr/>
+            <a:lstStyle/>
+            <a:p>
+              <a:endParaRPr lang="en-US"/>
+            </a:p>
+          </p:txBody>
         </p:sp>
         <p:sp>
           <p:nvSpPr>
@@ -2981,6 +3072,13 @@
               </a:ext>
             </a:extLst>
           </p:spPr>
+          <p:txBody>
+            <a:bodyPr/>
+            <a:lstStyle/>
+            <a:p>
+              <a:endParaRPr lang="en-US"/>
+            </a:p>
+          </p:txBody>
         </p:sp>
         <p:sp>
           <p:nvSpPr>
@@ -3039,6 +3137,13 @@
               </a:ext>
             </a:extLst>
           </p:spPr>
+          <p:txBody>
+            <a:bodyPr/>
+            <a:lstStyle/>
+            <a:p>
+              <a:endParaRPr lang="en-US"/>
+            </a:p>
+          </p:txBody>
         </p:sp>
         <p:sp>
           <p:nvSpPr>
@@ -3092,6 +3197,13 @@
               </a:ext>
             </a:extLst>
           </p:spPr>
+          <p:txBody>
+            <a:bodyPr/>
+            <a:lstStyle/>
+            <a:p>
+              <a:endParaRPr lang="en-US"/>
+            </a:p>
+          </p:txBody>
         </p:sp>
         <p:sp>
           <p:nvSpPr>
@@ -3145,6 +3257,13 @@
               </a:ext>
             </a:extLst>
           </p:spPr>
+          <p:txBody>
+            <a:bodyPr/>
+            <a:lstStyle/>
+            <a:p>
+              <a:endParaRPr lang="en-US"/>
+            </a:p>
+          </p:txBody>
         </p:sp>
         <p:sp>
           <p:nvSpPr>
@@ -3198,6 +3317,13 @@
               </a:ext>
             </a:extLst>
           </p:spPr>
+          <p:txBody>
+            <a:bodyPr/>
+            <a:lstStyle/>
+            <a:p>
+              <a:endParaRPr lang="en-US"/>
+            </a:p>
+          </p:txBody>
         </p:sp>
         <p:sp>
           <p:nvSpPr>
@@ -3251,6 +3377,13 @@
               </a:ext>
             </a:extLst>
           </p:spPr>
+          <p:txBody>
+            <a:bodyPr/>
+            <a:lstStyle/>
+            <a:p>
+              <a:endParaRPr lang="en-US"/>
+            </a:p>
+          </p:txBody>
         </p:sp>
       </p:grpSp>
       <p:grpSp>
@@ -3304,6 +3437,13 @@
               <a:schemeClr val="lt1"/>
             </a:fontRef>
           </p:style>
+          <p:txBody>
+            <a:bodyPr/>
+            <a:lstStyle/>
+            <a:p>
+              <a:endParaRPr lang="en-US"/>
+            </a:p>
+          </p:txBody>
         </p:sp>
         <p:sp>
           <p:nvSpPr>
@@ -3342,6 +3482,13 @@
               <a:schemeClr val="lt1"/>
             </a:fontRef>
           </p:style>
+          <p:txBody>
+            <a:bodyPr/>
+            <a:lstStyle/>
+            <a:p>
+              <a:endParaRPr lang="en-US"/>
+            </a:p>
+          </p:txBody>
         </p:sp>
         <p:sp>
           <p:nvSpPr>
@@ -3380,6 +3527,13 @@
               <a:schemeClr val="lt1"/>
             </a:fontRef>
           </p:style>
+          <p:txBody>
+            <a:bodyPr/>
+            <a:lstStyle/>
+            <a:p>
+              <a:endParaRPr lang="en-US"/>
+            </a:p>
+          </p:txBody>
         </p:sp>
       </p:grpSp>
       <p:sp>
@@ -3523,7 +3677,7 @@
           <a:p>
             <a:fld id="{F6CCBF3A-D7FB-4B97-8FD5-6FFB20CB1E84}" type="datetimeFigureOut">
               <a:rPr lang="en-US" smtClean="0"/>
-              <a:t>6/26/25</a:t>
+              <a:t>7/27/26</a:t>
             </a:fld>
             <a:endParaRPr lang="en-US"/>
           </a:p>
@@ -4982,7 +5136,7 @@
           <a:p>
             <a:fld id="{F6CCBF3A-D7FB-4B97-8FD5-6FFB20CB1E84}" type="datetimeFigureOut">
               <a:rPr lang="en-US" smtClean="0"/>
-              <a:t>6/26/25</a:t>
+              <a:t>7/27/26</a:t>
             </a:fld>
             <a:endParaRPr lang="en-US"/>
           </a:p>
@@ -6435,7 +6589,7 @@
           <a:p>
             <a:fld id="{F6CCBF3A-D7FB-4B97-8FD5-6FFB20CB1E84}" type="datetimeFigureOut">
               <a:rPr lang="en-US" smtClean="0"/>
-              <a:t>6/26/25</a:t>
+              <a:t>7/27/26</a:t>
             </a:fld>
             <a:endParaRPr lang="en-US"/>
           </a:p>
@@ -8983,7 +9137,7 @@
           <a:p>
             <a:fld id="{F6CCBF3A-D7FB-4B97-8FD5-6FFB20CB1E84}" type="datetimeFigureOut">
               <a:rPr lang="en-US" smtClean="0"/>
-              <a:t>6/26/25</a:t>
+              <a:t>7/27/26</a:t>
             </a:fld>
             <a:endParaRPr lang="en-US"/>
           </a:p>
@@ -10491,7 +10645,7 @@
           <a:p>
             <a:fld id="{F6CCBF3A-D7FB-4B97-8FD5-6FFB20CB1E84}" type="datetimeFigureOut">
               <a:rPr lang="en-US" smtClean="0"/>
-              <a:t>6/26/25</a:t>
+              <a:t>7/27/26</a:t>
             </a:fld>
             <a:endParaRPr lang="en-US"/>
           </a:p>
@@ -12012,7 +12166,7 @@
           <a:p>
             <a:fld id="{F6CCBF3A-D7FB-4B97-8FD5-6FFB20CB1E84}" type="datetimeFigureOut">
               <a:rPr lang="en-US" smtClean="0"/>
-              <a:t>6/26/25</a:t>
+              <a:t>7/27/26</a:t>
             </a:fld>
             <a:endParaRPr lang="en-US"/>
           </a:p>
@@ -13677,7 +13831,7 @@
           <a:p>
             <a:fld id="{F6CCBF3A-D7FB-4B97-8FD5-6FFB20CB1E84}" type="datetimeFigureOut">
               <a:rPr lang="en-US" smtClean="0"/>
-              <a:t>6/26/25</a:t>
+              <a:t>7/27/26</a:t>
             </a:fld>
             <a:endParaRPr lang="en-US"/>
           </a:p>
@@ -15075,7 +15229,7 @@
           <a:p>
             <a:fld id="{F6CCBF3A-D7FB-4B97-8FD5-6FFB20CB1E84}" type="datetimeFigureOut">
               <a:rPr lang="en-US" smtClean="0"/>
-              <a:t>6/26/25</a:t>
+              <a:t>7/27/26</a:t>
             </a:fld>
             <a:endParaRPr lang="en-US"/>
           </a:p>
@@ -15175,7 +15329,7 @@
           <a:p>
             <a:fld id="{F6CCBF3A-D7FB-4B97-8FD5-6FFB20CB1E84}" type="datetimeFigureOut">
               <a:rPr lang="en-US" smtClean="0"/>
-              <a:t>6/26/25</a:t>
+              <a:t>7/27/26</a:t>
             </a:fld>
             <a:endParaRPr lang="en-US"/>
           </a:p>
@@ -16701,7 +16855,7 @@
           <a:p>
             <a:fld id="{F6CCBF3A-D7FB-4B97-8FD5-6FFB20CB1E84}" type="datetimeFigureOut">
               <a:rPr lang="en-US" smtClean="0"/>
-              <a:t>6/26/25</a:t>
+              <a:t>7/27/26</a:t>
             </a:fld>
             <a:endParaRPr lang="en-US"/>
           </a:p>
@@ -18237,7 +18391,7 @@
           <a:p>
             <a:fld id="{F6CCBF3A-D7FB-4B97-8FD5-6FFB20CB1E84}" type="datetimeFigureOut">
               <a:rPr lang="en-US" smtClean="0"/>
-              <a:t>6/26/25</a:t>
+              <a:t>7/27/26</a:t>
             </a:fld>
             <a:endParaRPr lang="en-US"/>
           </a:p>
@@ -18460,7 +18614,7 @@
           <a:p>
             <a:fld id="{F6CCBF3A-D7FB-4B97-8FD5-6FFB20CB1E84}" type="datetimeFigureOut">
               <a:rPr lang="en-US" smtClean="0"/>
-              <a:t>6/26/25</a:t>
+              <a:t>7/27/26</a:t>
             </a:fld>
             <a:endParaRPr lang="en-US"/>
           </a:p>
